--- a/~sasano/lecture/pn2/26/P06.pptx
+++ b/~sasano/lecture/pn2/26/P06.pptx
@@ -348,7 +348,7 @@
             <a:fld id="{E90ED720-0104-4369-84BC-D37694168613}" type="datetimeFigureOut">
               <a:rPr kumimoji="1" lang="ja-JP" altLang="en-US" smtClean="0"/>
               <a:pPr/>
-              <a:t>2025/10/28</a:t>
+              <a:t>2026/9/28</a:t>
             </a:fld>
             <a:endParaRPr kumimoji="1" lang="ja-JP" altLang="en-US"/>
           </a:p>
@@ -545,7 +545,7 @@
             <a:fld id="{E90ED720-0104-4369-84BC-D37694168613}" type="datetimeFigureOut">
               <a:rPr kumimoji="1" lang="ja-JP" altLang="en-US" smtClean="0"/>
               <a:pPr/>
-              <a:t>2025/10/28</a:t>
+              <a:t>2026/9/28</a:t>
             </a:fld>
             <a:endParaRPr kumimoji="1" lang="ja-JP" altLang="en-US"/>
           </a:p>
@@ -752,7 +752,7 @@
             <a:fld id="{E90ED720-0104-4369-84BC-D37694168613}" type="datetimeFigureOut">
               <a:rPr kumimoji="1" lang="ja-JP" altLang="en-US" smtClean="0"/>
               <a:pPr/>
-              <a:t>2025/10/28</a:t>
+              <a:t>2026/9/28</a:t>
             </a:fld>
             <a:endParaRPr kumimoji="1" lang="ja-JP" altLang="en-US"/>
           </a:p>
@@ -949,7 +949,7 @@
             <a:fld id="{E90ED720-0104-4369-84BC-D37694168613}" type="datetimeFigureOut">
               <a:rPr kumimoji="1" lang="ja-JP" altLang="en-US" smtClean="0"/>
               <a:pPr/>
-              <a:t>2025/10/28</a:t>
+              <a:t>2026/9/28</a:t>
             </a:fld>
             <a:endParaRPr kumimoji="1" lang="ja-JP" altLang="en-US"/>
           </a:p>
@@ -1191,7 +1191,7 @@
             <a:fld id="{E90ED720-0104-4369-84BC-D37694168613}" type="datetimeFigureOut">
               <a:rPr kumimoji="1" lang="ja-JP" altLang="en-US" smtClean="0"/>
               <a:pPr/>
-              <a:t>2025/10/28</a:t>
+              <a:t>2026/9/28</a:t>
             </a:fld>
             <a:endParaRPr kumimoji="1" lang="ja-JP" altLang="en-US"/>
           </a:p>
@@ -1537,7 +1537,7 @@
             <a:fld id="{E90ED720-0104-4369-84BC-D37694168613}" type="datetimeFigureOut">
               <a:rPr kumimoji="1" lang="ja-JP" altLang="en-US" smtClean="0"/>
               <a:pPr/>
-              <a:t>2025/10/28</a:t>
+              <a:t>2026/9/28</a:t>
             </a:fld>
             <a:endParaRPr kumimoji="1" lang="ja-JP" altLang="en-US"/>
           </a:p>
@@ -2017,7 +2017,7 @@
             <a:fld id="{E90ED720-0104-4369-84BC-D37694168613}" type="datetimeFigureOut">
               <a:rPr kumimoji="1" lang="ja-JP" altLang="en-US" smtClean="0"/>
               <a:pPr/>
-              <a:t>2025/10/28</a:t>
+              <a:t>2026/9/28</a:t>
             </a:fld>
             <a:endParaRPr kumimoji="1" lang="ja-JP" altLang="en-US"/>
           </a:p>
@@ -2131,7 +2131,7 @@
             <a:fld id="{E90ED720-0104-4369-84BC-D37694168613}" type="datetimeFigureOut">
               <a:rPr kumimoji="1" lang="ja-JP" altLang="en-US" smtClean="0"/>
               <a:pPr/>
-              <a:t>2025/10/28</a:t>
+              <a:t>2026/9/28</a:t>
             </a:fld>
             <a:endParaRPr kumimoji="1" lang="ja-JP" altLang="en-US"/>
           </a:p>
@@ -2223,7 +2223,7 @@
             <a:fld id="{E90ED720-0104-4369-84BC-D37694168613}" type="datetimeFigureOut">
               <a:rPr kumimoji="1" lang="ja-JP" altLang="en-US" smtClean="0"/>
               <a:pPr/>
-              <a:t>2025/10/28</a:t>
+              <a:t>2026/9/28</a:t>
             </a:fld>
             <a:endParaRPr kumimoji="1" lang="ja-JP" altLang="en-US"/>
           </a:p>
@@ -2527,7 +2527,7 @@
             <a:fld id="{E90ED720-0104-4369-84BC-D37694168613}" type="datetimeFigureOut">
               <a:rPr kumimoji="1" lang="ja-JP" altLang="en-US" smtClean="0"/>
               <a:pPr/>
-              <a:t>2025/10/28</a:t>
+              <a:t>2026/9/28</a:t>
             </a:fld>
             <a:endParaRPr kumimoji="1" lang="ja-JP" altLang="en-US"/>
           </a:p>
@@ -2776,7 +2776,7 @@
             <a:fld id="{E90ED720-0104-4369-84BC-D37694168613}" type="datetimeFigureOut">
               <a:rPr kumimoji="1" lang="ja-JP" altLang="en-US" smtClean="0"/>
               <a:pPr/>
-              <a:t>2025/10/28</a:t>
+              <a:t>2026/9/28</a:t>
             </a:fld>
             <a:endParaRPr kumimoji="1" lang="ja-JP" altLang="en-US"/>
           </a:p>
@@ -3016,7 +3016,7 @@
             <a:fld id="{E90ED720-0104-4369-84BC-D37694168613}" type="datetimeFigureOut">
               <a:rPr kumimoji="1" lang="ja-JP" altLang="en-US" smtClean="0"/>
               <a:pPr/>
-              <a:t>2025/10/28</a:t>
+              <a:t>2026/9/28</a:t>
             </a:fld>
             <a:endParaRPr kumimoji="1" lang="ja-JP" altLang="en-US"/>
           </a:p>
@@ -3451,8 +3451,8 @@
         </p:nvSpPr>
         <p:spPr>
           <a:xfrm>
-            <a:off x="2751570" y="4977482"/>
-            <a:ext cx="3534942" cy="523220"/>
+            <a:off x="3821634" y="4941168"/>
+            <a:ext cx="1500732" cy="523220"/>
           </a:xfrm>
           <a:prstGeom prst="rect">
             <a:avLst/>
@@ -3465,9 +3465,14 @@
           </a:bodyPr>
           <a:lstStyle/>
           <a:p>
+            <a:pPr algn="ctr"/>
+            <a:r>
+              <a:rPr kumimoji="1" lang="ja-JP" altLang="en-US" sz="2800"/>
+              <a:t>篠埜　</a:t>
+            </a:r>
             <a:r>
               <a:rPr kumimoji="1" lang="ja-JP" altLang="en-US" sz="2800" dirty="0"/>
-              <a:t>情報工学科　篠埜　功</a:t>
+              <a:t>功</a:t>
             </a:r>
           </a:p>
         </p:txBody>
